--- a/tests/testresults/script_IQSlidedeck_IQobjects_Default_4_3.pptx
+++ b/tests/testresults/script_IQSlidedeck_IQobjects_Default_4_3.pptx
@@ -5958,7 +5958,7 @@
               <a:rPr/>
               <a:t>IQR Objects (non-QCed)
 Daniel Kaschek, IntiQuan
-2026-06-09</a:t>
+2026-06-25</a:t>
             </a:r>
           </a:p>
         </p:txBody>
@@ -6096,7 +6096,7 @@
           <a:p>
             <a:r>
               <a:rPr/>
-              <a:t>script_IQSlidedeck.R | Date: 2026-06-09 09:47:06.949497</a:t>
+              <a:t>script_IQSlidedeck.R | Date: 2026-06-25 13:42:34.215137</a:t>
             </a:r>
           </a:p>
         </p:txBody>
@@ -6464,7 +6464,7 @@
           <a:p>
             <a:r>
               <a:rPr/>
-              <a:t>script_IQSlidedeck.R | Date: 2026-06-09 09:47:07.894159</a:t>
+              <a:t>script_IQSlidedeck.R | Date: 2026-06-25 13:42:35.869257</a:t>
             </a:r>
           </a:p>
         </p:txBody>
@@ -6832,7 +6832,7 @@
           <a:p>
             <a:r>
               <a:rPr/>
-              <a:t>script_IQSlidedeck.R | Date: 2026-06-09 09:47:09.029357</a:t>
+              <a:t>script_IQSlidedeck.R | Date: 2026-06-25 13:42:37.091803</a:t>
             </a:r>
           </a:p>
         </p:txBody>
@@ -7022,7 +7022,7 @@
           <a:p>
             <a:r>
               <a:rPr/>
-              <a:t>script_IQSlidedeck.R | Date: 2026-06-09 09:47:17.913721</a:t>
+              <a:t>script_IQSlidedeck.R | Date: 2026-06-25 13:42:47.747289</a:t>
             </a:r>
           </a:p>
         </p:txBody>
@@ -7153,7 +7153,7 @@
           <a:p>
             <a:r>
               <a:rPr/>
-              <a:t>script_IQSlidedeck.R | Date: 2026-06-09 09:47:17.981216</a:t>
+              <a:t>script_IQSlidedeck.R | Date: 2026-06-25 13:42:47.800125</a:t>
             </a:r>
           </a:p>
         </p:txBody>
@@ -7313,7 +7313,7 @@
           <a:p>
             <a:r>
               <a:rPr/>
-              <a:t>script_IQSlidedeck.R | Date: 2026-06-09 09:47:18.055995</a:t>
+              <a:t>script_IQSlidedeck.R | Date: 2026-06-25 13:42:47.859144</a:t>
             </a:r>
           </a:p>
         </p:txBody>
@@ -7451,7 +7451,7 @@
           <a:p>
             <a:r>
               <a:rPr/>
-              <a:t>script_IQSlidedeck.R | Date: 2026-06-09 09:47:18.126241</a:t>
+              <a:t>script_IQSlidedeck.R | Date: 2026-06-25 13:42:47.917594</a:t>
             </a:r>
           </a:p>
         </p:txBody>
@@ -7890,7 +7890,7 @@
           <a:p>
             <a:r>
               <a:rPr/>
-              <a:t>IQSlidedeck_IQRobjects.R | Date: 2026-06-09 09:48:12.23004</a:t>
+              <a:t>IQSlidedeck_IQRobjects.R | Date: 2026-06-25 13:43:40.68891</a:t>
             </a:r>
           </a:p>
         </p:txBody>
@@ -8329,7 +8329,7 @@
           <a:p>
             <a:r>
               <a:rPr/>
-              <a:t>IQSlidedeck_IQRobjects.R | Date: 2026-06-09 09:48:14.337468</a:t>
+              <a:t>IQSlidedeck_IQRobjects.R | Date: 2026-06-25 13:43:42.166547</a:t>
             </a:r>
           </a:p>
         </p:txBody>
@@ -8716,7 +8716,7 @@
           <a:p>
             <a:r>
               <a:rPr/>
-              <a:t>IQSlidedeck_IQRobjects.R | Date: 2026-06-09 09:48:16.673334</a:t>
+              <a:t>IQSlidedeck_IQRobjects.R | Date: 2026-06-25 13:43:43.642429</a:t>
             </a:r>
           </a:p>
         </p:txBody>
@@ -9061,7 +9061,7 @@
           <a:p>
             <a:r>
               <a:rPr/>
-              <a:t>IQSlidedeck_IQRobjects.R | Date: 2026-06-09 09:48:20.406817</a:t>
+              <a:t>IQSlidedeck_IQRobjects.R | Date: 2026-06-25 13:43:46.645864</a:t>
             </a:r>
           </a:p>
         </p:txBody>
@@ -9194,7 +9194,7 @@
           <a:p>
             <a:r>
               <a:rPr/>
-              <a:t>IQSlidedeck_IQRobjects.R | Date: 2026-06-09 09:48:24.229172</a:t>
+              <a:t>IQSlidedeck_IQRobjects.R | Date: 2026-06-25 13:43:50.819413</a:t>
             </a:r>
           </a:p>
         </p:txBody>
@@ -9327,7 +9327,7 @@
           <a:p>
             <a:r>
               <a:rPr/>
-              <a:t>IQSlidedeck_IQRobjects.R | Date: 2026-06-09 09:48:27.041398</a:t>
+              <a:t>IQSlidedeck_IQRobjects.R | Date: 2026-06-25 13:43:53.626263</a:t>
             </a:r>
           </a:p>
         </p:txBody>
@@ -9514,7 +9514,7 @@
           <a:p>
             <a:r>
               <a:rPr/>
-              <a:t>IQSlidedeck_IQRobjects.R | Date: 2026-06-09 09:48:28.695461</a:t>
+              <a:t>IQSlidedeck_IQRobjects.R | Date: 2026-06-25 13:43:55.554646</a:t>
             </a:r>
           </a:p>
         </p:txBody>
@@ -9626,7 +9626,7 @@
           <a:p>
             <a:r>
               <a:rPr/>
-              <a:t>script_IQSlidedeck.R | Date: 2026-06-09 09:47:06.003796</a:t>
+              <a:t>script_IQSlidedeck.R | Date: 2026-06-25 13:42:33.134877</a:t>
             </a:r>
           </a:p>
         </p:txBody>
@@ -9843,7 +9843,7 @@
           <a:p>
             <a:r>
               <a:rPr/>
-              <a:t>script_IQSlidedeck.R | Date: 2026-06-09 09:47:06.191096</a:t>
+              <a:t>script_IQSlidedeck.R | Date: 2026-06-25 13:42:33.318072</a:t>
             </a:r>
           </a:p>
         </p:txBody>
@@ -9948,7 +9948,7 @@
           <a:p>
             <a:r>
               <a:rPr/>
-              <a:t>script_IQSlidedeck.R | Date: 2026-06-09 09:47:10.047847</a:t>
+              <a:t>script_IQSlidedeck.R | Date: 2026-06-25 13:42:38.134802</a:t>
             </a:r>
           </a:p>
         </p:txBody>
@@ -10053,7 +10053,7 @@
           <a:p>
             <a:r>
               <a:rPr/>
-              <a:t>script_IQSlidedeck.R | Date: 2026-06-09 09:47:11.742142</a:t>
+              <a:t>script_IQSlidedeck.R | Date: 2026-06-25 13:42:39.88711</a:t>
             </a:r>
           </a:p>
         </p:txBody>
@@ -10158,7 +10158,7 @@
           <a:p>
             <a:r>
               <a:rPr/>
-              <a:t>script_IQSlidedeck.R | Date: 2026-06-09 09:47:16.873372</a:t>
+              <a:t>script_IQSlidedeck.R | Date: 2026-06-25 13:42:46.922015</a:t>
             </a:r>
           </a:p>
         </p:txBody>
